--- a/docs/pptx/auc3/ritu-auc3-adjcif-anemia3.pptx
+++ b/docs/pptx/auc3/ritu-auc3-adjcif-anemia3.pptx
@@ -2271,7 +2271,7 @@
           </p:nvSpPr>
           <p:spPr>
             <a:xfrm>
-              <a:off x="972874" y="5289558"/>
+              <a:off x="972874" y="5291270"/>
               <a:ext cx="7644336" cy="0"/>
             </a:xfrm>
             <a:custGeom>
@@ -2314,7 +2314,7 @@
           </p:nvSpPr>
           <p:spPr>
             <a:xfrm>
-              <a:off x="972874" y="4707832"/>
+              <a:off x="972874" y="4712967"/>
               <a:ext cx="7644336" cy="0"/>
             </a:xfrm>
             <a:custGeom>
@@ -2357,7 +2357,7 @@
           </p:nvSpPr>
           <p:spPr>
             <a:xfrm>
-              <a:off x="972874" y="4126105"/>
+              <a:off x="972874" y="4134665"/>
               <a:ext cx="7644336" cy="0"/>
             </a:xfrm>
             <a:custGeom>
@@ -2400,7 +2400,7 @@
           </p:nvSpPr>
           <p:spPr>
             <a:xfrm>
-              <a:off x="972874" y="3544378"/>
+              <a:off x="972874" y="3556362"/>
               <a:ext cx="7644336" cy="0"/>
             </a:xfrm>
             <a:custGeom>
@@ -2443,7 +2443,7 @@
           </p:nvSpPr>
           <p:spPr>
             <a:xfrm>
-              <a:off x="972874" y="2962652"/>
+              <a:off x="972874" y="2978059"/>
               <a:ext cx="7644336" cy="0"/>
             </a:xfrm>
             <a:custGeom>
@@ -2701,7 +2701,7 @@
           </p:nvSpPr>
           <p:spPr>
             <a:xfrm>
-              <a:off x="972874" y="4998695"/>
+              <a:off x="972874" y="5002119"/>
               <a:ext cx="7644336" cy="0"/>
             </a:xfrm>
             <a:custGeom>
@@ -2744,7 +2744,7 @@
           </p:nvSpPr>
           <p:spPr>
             <a:xfrm>
-              <a:off x="972874" y="4416968"/>
+              <a:off x="972874" y="4423816"/>
               <a:ext cx="7644336" cy="0"/>
             </a:xfrm>
             <a:custGeom>
@@ -2787,7 +2787,7 @@
           </p:nvSpPr>
           <p:spPr>
             <a:xfrm>
-              <a:off x="972874" y="3835242"/>
+              <a:off x="972874" y="3845513"/>
               <a:ext cx="7644336" cy="0"/>
             </a:xfrm>
             <a:custGeom>
@@ -2830,7 +2830,7 @@
           </p:nvSpPr>
           <p:spPr>
             <a:xfrm>
-              <a:off x="972874" y="3253515"/>
+              <a:off x="972874" y="3267210"/>
               <a:ext cx="7644336" cy="0"/>
             </a:xfrm>
             <a:custGeom>
@@ -2873,7 +2873,7 @@
           </p:nvSpPr>
           <p:spPr>
             <a:xfrm>
-              <a:off x="972874" y="2671788"/>
+              <a:off x="972874" y="2688907"/>
               <a:ext cx="7644336" cy="0"/>
             </a:xfrm>
             <a:custGeom>
@@ -3045,78 +3045,78 @@
           </p:nvSpPr>
           <p:spPr>
             <a:xfrm>
-              <a:off x="1320344" y="5249095"/>
-              <a:ext cx="6949396" cy="314856"/>
+              <a:off x="1320344" y="5241147"/>
+              <a:ext cx="6949396" cy="323087"/>
             </a:xfrm>
             <a:custGeom>
               <a:avLst/>
               <a:pathLst>
-                <a:path w="6949396" h="314856">
+                <a:path w="6949396" h="323087">
                   <a:moveTo>
-                    <a:pt x="0" y="314856"/>
+                    <a:pt x="0" y="323087"/>
                   </a:moveTo>
                   <a:lnTo>
-                    <a:pt x="92658" y="314856"/>
-                  </a:lnTo>
-                  <a:lnTo>
-                    <a:pt x="92658" y="290406"/>
-                  </a:lnTo>
-                  <a:lnTo>
-                    <a:pt x="370634" y="290406"/>
-                  </a:lnTo>
-                  <a:lnTo>
-                    <a:pt x="370634" y="269893"/>
-                  </a:lnTo>
-                  <a:lnTo>
-                    <a:pt x="1482537" y="269893"/>
-                  </a:lnTo>
-                  <a:lnTo>
-                    <a:pt x="1482537" y="246578"/>
-                  </a:lnTo>
-                  <a:lnTo>
-                    <a:pt x="1667855" y="246578"/>
-                  </a:lnTo>
-                  <a:lnTo>
-                    <a:pt x="1667855" y="222934"/>
-                  </a:lnTo>
-                  <a:lnTo>
-                    <a:pt x="3706344" y="222934"/>
-                  </a:lnTo>
-                  <a:lnTo>
-                    <a:pt x="3706344" y="192840"/>
-                  </a:lnTo>
-                  <a:lnTo>
-                    <a:pt x="3799003" y="192840"/>
-                  </a:lnTo>
-                  <a:lnTo>
-                    <a:pt x="3799003" y="141587"/>
-                  </a:lnTo>
-                  <a:lnTo>
-                    <a:pt x="4540272" y="141587"/>
-                  </a:lnTo>
-                  <a:lnTo>
-                    <a:pt x="4540272" y="118007"/>
-                  </a:lnTo>
-                  <a:lnTo>
-                    <a:pt x="5559517" y="118007"/>
-                  </a:lnTo>
-                  <a:lnTo>
-                    <a:pt x="5559517" y="95478"/>
-                  </a:lnTo>
-                  <a:lnTo>
-                    <a:pt x="6115469" y="95478"/>
-                  </a:lnTo>
-                  <a:lnTo>
-                    <a:pt x="6115469" y="73714"/>
-                  </a:lnTo>
-                  <a:lnTo>
-                    <a:pt x="6393445" y="73714"/>
-                  </a:lnTo>
-                  <a:lnTo>
-                    <a:pt x="6393445" y="26204"/>
-                  </a:lnTo>
-                  <a:lnTo>
-                    <a:pt x="6949396" y="26204"/>
+                    <a:pt x="92658" y="323087"/>
+                  </a:lnTo>
+                  <a:lnTo>
+                    <a:pt x="92658" y="298699"/>
+                  </a:lnTo>
+                  <a:lnTo>
+                    <a:pt x="370634" y="298699"/>
+                  </a:lnTo>
+                  <a:lnTo>
+                    <a:pt x="370634" y="278094"/>
+                  </a:lnTo>
+                  <a:lnTo>
+                    <a:pt x="1482537" y="278094"/>
+                  </a:lnTo>
+                  <a:lnTo>
+                    <a:pt x="1482537" y="254716"/>
+                  </a:lnTo>
+                  <a:lnTo>
+                    <a:pt x="1667855" y="254716"/>
+                  </a:lnTo>
+                  <a:lnTo>
+                    <a:pt x="1667855" y="230809"/>
+                  </a:lnTo>
+                  <a:lnTo>
+                    <a:pt x="3706344" y="230809"/>
+                  </a:lnTo>
+                  <a:lnTo>
+                    <a:pt x="3706344" y="199662"/>
+                  </a:lnTo>
+                  <a:lnTo>
+                    <a:pt x="3799003" y="199662"/>
+                  </a:lnTo>
+                  <a:lnTo>
+                    <a:pt x="3799003" y="146412"/>
+                  </a:lnTo>
+                  <a:lnTo>
+                    <a:pt x="4540272" y="146412"/>
+                  </a:lnTo>
+                  <a:lnTo>
+                    <a:pt x="4540272" y="121937"/>
+                  </a:lnTo>
+                  <a:lnTo>
+                    <a:pt x="5559517" y="121937"/>
+                  </a:lnTo>
+                  <a:lnTo>
+                    <a:pt x="5559517" y="98591"/>
+                  </a:lnTo>
+                  <a:lnTo>
+                    <a:pt x="6115469" y="98591"/>
+                  </a:lnTo>
+                  <a:lnTo>
+                    <a:pt x="6115469" y="76062"/>
+                  </a:lnTo>
+                  <a:lnTo>
+                    <a:pt x="6393445" y="76062"/>
+                  </a:lnTo>
+                  <a:lnTo>
+                    <a:pt x="6393445" y="26994"/>
+                  </a:lnTo>
+                  <a:lnTo>
+                    <a:pt x="6949396" y="26994"/>
                   </a:lnTo>
                   <a:lnTo>
                     <a:pt x="6949396" y="0"/>
@@ -3149,77 +3149,77 @@
           <p:spPr>
             <a:xfrm>
               <a:off x="1320344" y="2861938"/>
-              <a:ext cx="6949396" cy="2465922"/>
+              <a:ext cx="6949396" cy="2471439"/>
             </a:xfrm>
             <a:custGeom>
               <a:avLst/>
               <a:pathLst>
-                <a:path w="6949396" h="2465922">
+                <a:path w="6949396" h="2471439">
                   <a:moveTo>
-                    <a:pt x="0" y="2465922"/>
+                    <a:pt x="0" y="2471439"/>
                   </a:moveTo>
                   <a:lnTo>
-                    <a:pt x="92658" y="2465922"/>
-                  </a:lnTo>
-                  <a:lnTo>
-                    <a:pt x="92658" y="2232903"/>
-                  </a:lnTo>
-                  <a:lnTo>
-                    <a:pt x="370634" y="2232903"/>
-                  </a:lnTo>
-                  <a:lnTo>
-                    <a:pt x="370634" y="2050873"/>
-                  </a:lnTo>
-                  <a:lnTo>
-                    <a:pt x="1482537" y="2050873"/>
-                  </a:lnTo>
-                  <a:lnTo>
-                    <a:pt x="1482537" y="1851093"/>
-                  </a:lnTo>
-                  <a:lnTo>
-                    <a:pt x="1667855" y="1851093"/>
-                  </a:lnTo>
-                  <a:lnTo>
-                    <a:pt x="1667855" y="1649445"/>
-                  </a:lnTo>
-                  <a:lnTo>
-                    <a:pt x="3706344" y="1649445"/>
-                  </a:lnTo>
-                  <a:lnTo>
-                    <a:pt x="3706344" y="1389136"/>
-                  </a:lnTo>
-                  <a:lnTo>
-                    <a:pt x="3799003" y="1389136"/>
-                  </a:lnTo>
-                  <a:lnTo>
-                    <a:pt x="3799003" y="954677"/>
-                  </a:lnTo>
-                  <a:lnTo>
-                    <a:pt x="4540272" y="954677"/>
-                  </a:lnTo>
-                  <a:lnTo>
-                    <a:pt x="4540272" y="770107"/>
-                  </a:lnTo>
-                  <a:lnTo>
-                    <a:pt x="5559517" y="770107"/>
-                  </a:lnTo>
-                  <a:lnTo>
-                    <a:pt x="5559517" y="604932"/>
-                  </a:lnTo>
-                  <a:lnTo>
-                    <a:pt x="6115469" y="604932"/>
-                  </a:lnTo>
-                  <a:lnTo>
-                    <a:pt x="6115469" y="454877"/>
-                  </a:lnTo>
-                  <a:lnTo>
-                    <a:pt x="6393445" y="454877"/>
-                  </a:lnTo>
-                  <a:lnTo>
-                    <a:pt x="6393445" y="153815"/>
-                  </a:lnTo>
-                  <a:lnTo>
-                    <a:pt x="6949396" y="153815"/>
+                    <a:pt x="92658" y="2471439"/>
+                  </a:lnTo>
+                  <a:lnTo>
+                    <a:pt x="92658" y="2241967"/>
+                  </a:lnTo>
+                  <a:lnTo>
+                    <a:pt x="370634" y="2241967"/>
+                  </a:lnTo>
+                  <a:lnTo>
+                    <a:pt x="370634" y="2061630"/>
+                  </a:lnTo>
+                  <a:lnTo>
+                    <a:pt x="1482537" y="2061630"/>
+                  </a:lnTo>
+                  <a:lnTo>
+                    <a:pt x="1482537" y="1864784"/>
+                  </a:lnTo>
+                  <a:lnTo>
+                    <a:pt x="1667855" y="1864784"/>
+                  </a:lnTo>
+                  <a:lnTo>
+                    <a:pt x="1667855" y="1665729"/>
+                  </a:lnTo>
+                  <a:lnTo>
+                    <a:pt x="3706344" y="1665729"/>
+                  </a:lnTo>
+                  <a:lnTo>
+                    <a:pt x="3706344" y="1404475"/>
+                  </a:lnTo>
+                  <a:lnTo>
+                    <a:pt x="3799003" y="1404475"/>
+                  </a:lnTo>
+                  <a:lnTo>
+                    <a:pt x="3799003" y="967086"/>
+                  </a:lnTo>
+                  <a:lnTo>
+                    <a:pt x="4540272" y="967086"/>
+                  </a:lnTo>
+                  <a:lnTo>
+                    <a:pt x="4540272" y="780506"/>
+                  </a:lnTo>
+                  <a:lnTo>
+                    <a:pt x="5559517" y="780506"/>
+                  </a:lnTo>
+                  <a:lnTo>
+                    <a:pt x="5559517" y="613250"/>
+                  </a:lnTo>
+                  <a:lnTo>
+                    <a:pt x="6115469" y="613250"/>
+                  </a:lnTo>
+                  <a:lnTo>
+                    <a:pt x="6115469" y="461116"/>
+                  </a:lnTo>
+                  <a:lnTo>
+                    <a:pt x="6393445" y="461116"/>
+                  </a:lnTo>
+                  <a:lnTo>
+                    <a:pt x="6393445" y="155828"/>
+                  </a:lnTo>
+                  <a:lnTo>
+                    <a:pt x="6949396" y="155828"/>
                   </a:lnTo>
                   <a:lnTo>
                     <a:pt x="6949396" y="0"/>
@@ -3297,7 +3297,7 @@
           </p:nvSpPr>
           <p:spPr>
             <a:xfrm>
-              <a:off x="692708" y="4958644"/>
+              <a:off x="692708" y="4962068"/>
               <a:ext cx="217535" cy="80101"/>
             </a:xfrm>
             <a:prstGeom prst="rect">
@@ -3343,7 +3343,7 @@
           </p:nvSpPr>
           <p:spPr>
             <a:xfrm>
-              <a:off x="692708" y="4376918"/>
+              <a:off x="692708" y="4383765"/>
               <a:ext cx="217535" cy="80101"/>
             </a:xfrm>
             <a:prstGeom prst="rect">
@@ -3389,7 +3389,7 @@
           </p:nvSpPr>
           <p:spPr>
             <a:xfrm>
-              <a:off x="692708" y="3795191"/>
+              <a:off x="692708" y="3805462"/>
               <a:ext cx="217535" cy="80101"/>
             </a:xfrm>
             <a:prstGeom prst="rect">
@@ -3435,7 +3435,7 @@
           </p:nvSpPr>
           <p:spPr>
             <a:xfrm>
-              <a:off x="692708" y="3213464"/>
+              <a:off x="692708" y="3227159"/>
               <a:ext cx="217535" cy="80101"/>
             </a:xfrm>
             <a:prstGeom prst="rect">
@@ -3481,7 +3481,7 @@
           </p:nvSpPr>
           <p:spPr>
             <a:xfrm>
-              <a:off x="692708" y="2631737"/>
+              <a:off x="692708" y="2648857"/>
               <a:ext cx="217535" cy="80101"/>
             </a:xfrm>
             <a:prstGeom prst="rect">
@@ -3962,7 +3962,7 @@
                   <a:latin typeface="Helvetica"/>
                   <a:cs typeface="Helvetica"/>
                 </a:rPr>
-                <a:t>Discrep &gt;= +25 vs &lt;+25: subHR = 40.60 (95% CI 0.76-2175.42), p = 0.068</a:t>
+                <a:t>Discrep &gt;= +25 vs &lt;+25: subHR = 38.43 (95% CI 0.80-1846.73), p = 0.065</a:t>
               </a:r>
             </a:p>
           </p:txBody>
